--- a/04-practice-git/slides/04-git-basic.pptx
+++ b/04-practice-git/slides/04-git-basic.pptx
@@ -1208,37 +1208,18 @@
               <a:t>Git</a:t>
             </a:r>
             <a:r>
-              <a:rPr lang="ja-JP" altLang="en-US" sz="4000" dirty="0">
-                <a:solidFill>
-                  <a:srgbClr val="011893"/>
-                </a:solidFill>
-              </a:rPr>
-              <a:t>の操作</a:t>
-            </a:r>
-            <a:r>
-              <a:rPr lang="en-US" altLang="ja-JP" sz="4000" dirty="0">
-                <a:solidFill>
-                  <a:srgbClr val="011893"/>
-                </a:solidFill>
-              </a:rPr>
-              <a:t>(</a:t>
-            </a:r>
-            <a:r>
               <a:rPr lang="ja-JP" altLang="en-US" sz="4000">
                 <a:solidFill>
                   <a:srgbClr val="011893"/>
                 </a:solidFill>
               </a:rPr>
-              <a:t>基本編</a:t>
-            </a:r>
-            <a:r>
-              <a:rPr lang="en-US" altLang="ja-JP" sz="4000" dirty="0">
-                <a:solidFill>
-                  <a:srgbClr val="011893"/>
-                </a:solidFill>
-              </a:rPr>
-              <a:t>)</a:t>
-            </a:r>
+              <a:t>の基本操作</a:t>
+            </a:r>
+            <a:endParaRPr lang="en-US" altLang="ja-JP" sz="4000" dirty="0">
+              <a:solidFill>
+                <a:srgbClr val="011893"/>
+              </a:solidFill>
+            </a:endParaRPr>
           </a:p>
         </p:txBody>
       </p:sp>

--- a/04-practice-git/slides/04-git-basic.pptx
+++ b/04-practice-git/slides/04-git-basic.pptx
@@ -238,7 +238,7 @@
           </a:lstStyle>
           <a:p>
             <a:fld id="{6B8D1B20-A248-FB47-8240-73C0C5F47C9D}" type="datetimeFigureOut">
-              <a:t>2026/3/4</a:t>
+              <a:t>2026/3/6</a:t>
             </a:fld>
             <a:endParaRPr kumimoji="1" lang="ja-JP" altLang="en-US"/>
           </a:p>
@@ -1328,7 +1328,7 @@
               <a:t>2026</a:t>
             </a:r>
             <a:r>
-              <a:rPr kumimoji="1" lang="ja-JP" altLang="en-US" sz="1600"/>
+              <a:rPr kumimoji="1" lang="ja-JP" altLang="en-US" sz="1600" dirty="0"/>
               <a:t>年</a:t>
             </a:r>
             <a:r>
@@ -1336,7 +1336,7 @@
               <a:t>3</a:t>
             </a:r>
             <a:r>
-              <a:rPr kumimoji="1" lang="ja-JP" altLang="en-US" sz="1600"/>
+              <a:rPr kumimoji="1" lang="ja-JP" altLang="en-US" sz="1600" dirty="0"/>
               <a:t>月</a:t>
             </a:r>
             <a:r>
@@ -1344,7 +1344,7 @@
               <a:t>9</a:t>
             </a:r>
             <a:r>
-              <a:rPr kumimoji="1" lang="ja-JP" altLang="en-US" sz="1600"/>
+              <a:rPr kumimoji="1" lang="ja-JP" altLang="en-US" sz="1600" dirty="0"/>
               <a:t>日</a:t>
             </a:r>
             <a:r>
@@ -1352,7 +1352,7 @@
               <a:t> </a:t>
             </a:r>
             <a:r>
-              <a:rPr kumimoji="1" lang="ja-JP" altLang="en-US" sz="1600"/>
+              <a:rPr kumimoji="1" lang="ja-JP" altLang="en-US" sz="1600" dirty="0"/>
               <a:t>計算物理春の学校</a:t>
             </a:r>
             <a:r>
@@ -1360,7 +1360,7 @@
               <a:t>2026</a:t>
             </a:r>
             <a:r>
-              <a:rPr kumimoji="1" lang="ja-JP" altLang="en-US" sz="1600"/>
+              <a:rPr kumimoji="1" lang="ja-JP" altLang="en-US" sz="1600" dirty="0"/>
               <a:t>「計算物理屋のための</a:t>
             </a:r>
             <a:r>
@@ -1368,7 +1368,7 @@
               <a:t>Git/GitHub</a:t>
             </a:r>
             <a:r>
-              <a:rPr kumimoji="1" lang="ja-JP" altLang="en-US" sz="1600"/>
+              <a:rPr kumimoji="1" lang="ja-JP" altLang="en-US" sz="1600" dirty="0"/>
               <a:t>入門」</a:t>
             </a:r>
           </a:p>
@@ -1492,13 +1492,7 @@
               <a:rPr kumimoji="1" lang="en-US" altLang="ja-JP" sz="2000" dirty="0">
                 <a:latin typeface="Consolas" panose="020B0609020204030204" pitchFamily="49" charset="0"/>
               </a:rPr>
-              <a:t> </a:t>
-            </a:r>
-            <a:r>
-              <a:rPr kumimoji="1" lang="en-US" altLang="ja-JP" sz="2000" dirty="0" err="1">
-                <a:latin typeface="Consolas" panose="020B0609020204030204" pitchFamily="49" charset="0"/>
-              </a:rPr>
-              <a:t>github</a:t>
+              <a:t> github</a:t>
             </a:r>
             <a:endParaRPr lang="en-US" altLang="ja-JP" sz="2000" dirty="0">
               <a:latin typeface="Consolas" panose="020B0609020204030204" pitchFamily="49" charset="0"/>
@@ -1509,17 +1503,8 @@
               <a:rPr kumimoji="1" lang="en-US" altLang="ja-JP" sz="2000" dirty="0">
                 <a:latin typeface="Consolas" panose="020B0609020204030204" pitchFamily="49" charset="0"/>
               </a:rPr>
-              <a:t>cd </a:t>
-            </a:r>
-            <a:r>
-              <a:rPr kumimoji="1" lang="en-US" altLang="ja-JP" sz="2000" dirty="0" err="1">
-                <a:latin typeface="Consolas" panose="020B0609020204030204" pitchFamily="49" charset="0"/>
-              </a:rPr>
-              <a:t>github</a:t>
-            </a:r>
-            <a:endParaRPr kumimoji="1" lang="en-US" altLang="ja-JP" sz="2000" dirty="0">
-              <a:latin typeface="Consolas" panose="020B0609020204030204" pitchFamily="49" charset="0"/>
-            </a:endParaRPr>
+              <a:t>cd github</a:t>
+            </a:r>
           </a:p>
         </p:txBody>
       </p:sp>
@@ -1681,7 +1666,7 @@
           <a:lstStyle/>
           <a:p>
             <a:r>
-              <a:rPr kumimoji="1" lang="en-US" altLang="ja-JP" dirty="0" err="1"/>
+              <a:rPr kumimoji="1" lang="en-US" altLang="ja-JP" dirty="0"/>
               <a:t>github</a:t>
             </a:r>
             <a:endParaRPr kumimoji="1" lang="ja-JP" altLang="en-US" dirty="0"/>
@@ -2159,7 +2144,7 @@
           <a:lstStyle/>
           <a:p>
             <a:r>
-              <a:rPr kumimoji="1" lang="en-US" altLang="ja-JP" dirty="0" err="1"/>
+              <a:rPr kumimoji="1" lang="en-US" altLang="ja-JP" dirty="0"/>
               <a:t>github</a:t>
             </a:r>
             <a:endParaRPr kumimoji="1" lang="ja-JP" altLang="en-US" dirty="0"/>
@@ -2921,18 +2906,14 @@
             </a:r>
             <a:r>
               <a:rPr kumimoji="1" lang="en-US" altLang="ja-JP" dirty="0"/>
-              <a:t>cd </a:t>
-            </a:r>
-            <a:r>
-              <a:rPr kumimoji="1" lang="en-US" altLang="ja-JP" dirty="0" err="1"/>
-              <a:t>github</a:t>
+              <a:t>cd github</a:t>
             </a:r>
             <a:r>
               <a:rPr kumimoji="1" lang="ja-JP" altLang="en-US" dirty="0"/>
               <a:t>」コマンドにより、カレントディレクトリを</a:t>
             </a:r>
             <a:r>
-              <a:rPr kumimoji="1" lang="en-US" altLang="ja-JP" dirty="0" err="1"/>
+              <a:rPr kumimoji="1" lang="en-US" altLang="ja-JP" dirty="0"/>
               <a:t>github</a:t>
             </a:r>
             <a:r>
@@ -2948,11 +2929,7 @@
             </a:r>
             <a:r>
               <a:rPr kumimoji="1" lang="en-US" altLang="ja-JP" dirty="0"/>
-              <a:t>(/z/</a:t>
-            </a:r>
-            <a:r>
-              <a:rPr kumimoji="1" lang="en-US" altLang="ja-JP" dirty="0" err="1"/>
-              <a:t>github</a:t>
+              <a:t>(/z/github</a:t>
             </a:r>
             <a:r>
               <a:rPr kumimoji="1" lang="ja-JP" altLang="en-US" dirty="0"/>
@@ -3191,18 +3168,14 @@
             </a:r>
             <a:r>
               <a:rPr kumimoji="1" lang="en-US" altLang="ja-JP" dirty="0"/>
-              <a:t>cd </a:t>
-            </a:r>
-            <a:r>
-              <a:rPr kumimoji="1" lang="en-US" altLang="ja-JP" dirty="0" err="1"/>
-              <a:t>github</a:t>
+              <a:t>cd github</a:t>
             </a:r>
             <a:r>
               <a:rPr kumimoji="1" lang="ja-JP" altLang="en-US" dirty="0"/>
               <a:t>」コマンドにより、カレントディレクトリを</a:t>
             </a:r>
             <a:r>
-              <a:rPr kumimoji="1" lang="en-US" altLang="ja-JP" dirty="0" err="1"/>
+              <a:rPr kumimoji="1" lang="en-US" altLang="ja-JP" dirty="0"/>
               <a:t>github</a:t>
             </a:r>
             <a:r>
@@ -3214,13 +3187,8 @@
           <a:p>
             <a:r>
               <a:rPr kumimoji="1" lang="ja-JP" altLang="en-US" dirty="0"/>
-              <a:t>右の表示</a:t>
-            </a:r>
-            <a:r>
-              <a:rPr kumimoji="1" lang="ja-JP" altLang="en-US"/>
-              <a:t>が変わる</a:t>
-            </a:r>
-            <a:endParaRPr kumimoji="1" lang="ja-JP" altLang="en-US" dirty="0"/>
+              <a:t>右の表示が変わる</a:t>
+            </a:r>
           </a:p>
         </p:txBody>
       </p:sp>
@@ -4839,7 +4807,7 @@
           <a:lstStyle/>
           <a:p>
             <a:r>
-              <a:rPr kumimoji="1" lang="en-US" altLang="ja-JP" dirty="0" err="1"/>
+              <a:rPr kumimoji="1" lang="en-US" altLang="ja-JP" dirty="0"/>
               <a:t>github</a:t>
             </a:r>
             <a:endParaRPr kumimoji="1" lang="ja-JP" altLang="en-US" dirty="0"/>
@@ -6507,7 +6475,7 @@
           <a:lstStyle/>
           <a:p>
             <a:r>
-              <a:rPr kumimoji="1" lang="en-US" altLang="ja-JP" dirty="0" err="1"/>
+              <a:rPr kumimoji="1" lang="en-US" altLang="ja-JP" dirty="0"/>
               <a:t>github</a:t>
             </a:r>
             <a:endParaRPr kumimoji="1" lang="ja-JP" altLang="en-US" dirty="0"/>
@@ -17528,7 +17496,7 @@
           <a:lstStyle/>
           <a:p>
             <a:r>
-              <a:rPr kumimoji="1" lang="ja-JP" altLang="en-US"/>
+              <a:rPr kumimoji="1" lang="ja-JP" altLang="en-US" dirty="0"/>
               <a:t>「計算物理屋のための</a:t>
             </a:r>
             <a:r>
@@ -17536,7 +17504,7 @@
               <a:t>Git/GitHub</a:t>
             </a:r>
             <a:r>
-              <a:rPr kumimoji="1" lang="ja-JP" altLang="en-US"/>
+              <a:rPr kumimoji="1" lang="ja-JP" altLang="en-US" dirty="0"/>
               <a:t>入門」のサイトにアクセス</a:t>
             </a:r>
           </a:p>
@@ -20537,7 +20505,7 @@
         <p:spPr>
           <a:xfrm>
             <a:off x="539552" y="1139119"/>
-            <a:ext cx="5348452" cy="646331"/>
+            <a:ext cx="4968027" cy="646331"/>
           </a:xfrm>
           <a:prstGeom prst="rect">
             <a:avLst/>
@@ -20556,23 +20524,15 @@
             </a:pPr>
             <a:r>
               <a:rPr kumimoji="1" lang="ja-JP" altLang="en-US" dirty="0"/>
-              <a:t>検索</a:t>
-            </a:r>
-            <a:r>
-              <a:rPr kumimoji="1" lang="ja-JP" altLang="en-US"/>
-              <a:t>ボックスに</a:t>
+              <a:t>検索ボックスに</a:t>
             </a:r>
             <a:r>
               <a:rPr lang="en-US" altLang="ja-JP" dirty="0"/>
               <a:t>ubuntu</a:t>
             </a:r>
             <a:r>
-              <a:rPr lang="ja-JP" altLang="en-US"/>
-              <a:t>と</a:t>
-            </a:r>
-            <a:r>
               <a:rPr lang="ja-JP" altLang="en-US" dirty="0"/>
-              <a:t>入力</a:t>
+              <a:t>と入力</a:t>
             </a:r>
             <a:endParaRPr lang="en-US" altLang="ja-JP" dirty="0"/>
           </a:p>
@@ -20583,27 +20543,260 @@
             </a:pPr>
             <a:r>
               <a:rPr kumimoji="1" lang="ja-JP" altLang="en-US" dirty="0"/>
-              <a:t>表示</a:t>
-            </a:r>
-            <a:r>
-              <a:rPr kumimoji="1" lang="ja-JP" altLang="en-US"/>
-              <a:t>された「</a:t>
+              <a:t>表示された「</a:t>
             </a:r>
             <a:r>
               <a:rPr kumimoji="1" lang="en-US" altLang="ja-JP" dirty="0"/>
-              <a:t>Ubuntu 24.04.1 LTS</a:t>
-            </a:r>
-            <a:r>
-              <a:rPr kumimoji="1" lang="ja-JP" altLang="en-US"/>
-              <a:t>」</a:t>
+              <a:t>Ubuntu</a:t>
             </a:r>
             <a:r>
               <a:rPr kumimoji="1" lang="ja-JP" altLang="en-US" dirty="0"/>
-              <a:t>をクリック</a:t>
-            </a:r>
-          </a:p>
-        </p:txBody>
-      </p:sp>
+              <a:t>」をクリック</a:t>
+            </a:r>
+            <a:r>
+              <a:rPr lang="ja-JP" altLang="en-US" dirty="0"/>
+              <a:t>して起動</a:t>
+            </a:r>
+            <a:endParaRPr kumimoji="1" lang="ja-JP" altLang="en-US" dirty="0"/>
+          </a:p>
+        </p:txBody>
+      </p:sp>
+      <p:pic>
+        <p:nvPicPr>
+          <p:cNvPr id="5" name="図 4">
+            <a:extLst>
+              <a:ext uri="{FF2B5EF4-FFF2-40B4-BE49-F238E27FC236}">
+                <a16:creationId xmlns:a16="http://schemas.microsoft.com/office/drawing/2014/main" id="{06FC5C78-5519-82EF-B04E-044AA340FBD0}"/>
+              </a:ext>
+            </a:extLst>
+          </p:cNvPr>
+          <p:cNvPicPr>
+            <a:picLocks noChangeAspect="1"/>
+          </p:cNvPicPr>
+          <p:nvPr/>
+        </p:nvPicPr>
+        <p:blipFill>
+          <a:blip r:embed="rId2"/>
+          <a:stretch>
+            <a:fillRect/>
+          </a:stretch>
+        </p:blipFill>
+        <p:spPr>
+          <a:xfrm>
+            <a:off x="1619672" y="1844824"/>
+            <a:ext cx="4659956" cy="4555238"/>
+          </a:xfrm>
+          <a:prstGeom prst="rect">
+            <a:avLst/>
+          </a:prstGeom>
+        </p:spPr>
+      </p:pic>
+      <p:sp>
+        <p:nvSpPr>
+          <p:cNvPr id="8" name="四角形: 角を丸くする 2">
+            <a:extLst>
+              <a:ext uri="{FF2B5EF4-FFF2-40B4-BE49-F238E27FC236}">
+                <a16:creationId xmlns:a16="http://schemas.microsoft.com/office/drawing/2014/main" id="{AD2B8A23-4873-2AA4-C1ED-8F3421EA2788}"/>
+              </a:ext>
+            </a:extLst>
+          </p:cNvPr>
+          <p:cNvSpPr/>
+          <p:nvPr/>
+        </p:nvSpPr>
+        <p:spPr>
+          <a:xfrm>
+            <a:off x="1784464" y="6146458"/>
+            <a:ext cx="1347376" cy="253604"/>
+          </a:xfrm>
+          <a:prstGeom prst="roundRect">
+            <a:avLst/>
+          </a:prstGeom>
+          <a:noFill/>
+          <a:ln w="19050">
+            <a:solidFill>
+              <a:srgbClr val="FF0000"/>
+            </a:solidFill>
+          </a:ln>
+        </p:spPr>
+        <p:style>
+          <a:lnRef idx="2">
+            <a:schemeClr val="accent1">
+              <a:shade val="50000"/>
+            </a:schemeClr>
+          </a:lnRef>
+          <a:fillRef idx="1">
+            <a:schemeClr val="accent1"/>
+          </a:fillRef>
+          <a:effectRef idx="0">
+            <a:schemeClr val="accent1"/>
+          </a:effectRef>
+          <a:fontRef idx="minor">
+            <a:schemeClr val="lt1"/>
+          </a:fontRef>
+        </p:style>
+        <p:txBody>
+          <a:bodyPr rtlCol="0" anchor="ctr"/>
+          <a:lstStyle/>
+          <a:p>
+            <a:pPr algn="ctr"/>
+            <a:r>
+              <a:rPr kumimoji="1" lang="en-US" altLang="ja-JP" dirty="0"/>
+              <a:t>c</a:t>
+            </a:r>
+            <a:endParaRPr kumimoji="1" lang="ja-JP" altLang="en-US" dirty="0"/>
+          </a:p>
+        </p:txBody>
+      </p:sp>
+      <p:sp>
+        <p:nvSpPr>
+          <p:cNvPr id="9" name="四角形: 角を丸くする 2">
+            <a:extLst>
+              <a:ext uri="{FF2B5EF4-FFF2-40B4-BE49-F238E27FC236}">
+                <a16:creationId xmlns:a16="http://schemas.microsoft.com/office/drawing/2014/main" id="{A0EB7AB7-8244-A4FE-0CD5-0A16C0CE6E5B}"/>
+              </a:ext>
+            </a:extLst>
+          </p:cNvPr>
+          <p:cNvSpPr/>
+          <p:nvPr/>
+        </p:nvSpPr>
+        <p:spPr>
+          <a:xfrm>
+            <a:off x="1907704" y="2432474"/>
+            <a:ext cx="1944216" cy="420461"/>
+          </a:xfrm>
+          <a:prstGeom prst="roundRect">
+            <a:avLst/>
+          </a:prstGeom>
+          <a:noFill/>
+          <a:ln w="19050">
+            <a:solidFill>
+              <a:srgbClr val="FF0000"/>
+            </a:solidFill>
+          </a:ln>
+        </p:spPr>
+        <p:style>
+          <a:lnRef idx="2">
+            <a:schemeClr val="accent1">
+              <a:shade val="50000"/>
+            </a:schemeClr>
+          </a:lnRef>
+          <a:fillRef idx="1">
+            <a:schemeClr val="accent1"/>
+          </a:fillRef>
+          <a:effectRef idx="0">
+            <a:schemeClr val="accent1"/>
+          </a:effectRef>
+          <a:fontRef idx="minor">
+            <a:schemeClr val="lt1"/>
+          </a:fontRef>
+        </p:style>
+        <p:txBody>
+          <a:bodyPr rtlCol="0" anchor="ctr"/>
+          <a:lstStyle/>
+          <a:p>
+            <a:pPr algn="ctr"/>
+            <a:r>
+              <a:rPr kumimoji="1" lang="en-US" altLang="ja-JP" dirty="0"/>
+              <a:t>c</a:t>
+            </a:r>
+            <a:endParaRPr kumimoji="1" lang="ja-JP" altLang="en-US" dirty="0"/>
+          </a:p>
+        </p:txBody>
+      </p:sp>
+      <p:cxnSp>
+        <p:nvCxnSpPr>
+          <p:cNvPr id="10" name="コネクタ: カギ線 9">
+            <a:extLst>
+              <a:ext uri="{FF2B5EF4-FFF2-40B4-BE49-F238E27FC236}">
+                <a16:creationId xmlns:a16="http://schemas.microsoft.com/office/drawing/2014/main" id="{4F7639FB-B961-C18F-CA5F-8D70F506F932}"/>
+              </a:ext>
+            </a:extLst>
+          </p:cNvPr>
+          <p:cNvCxnSpPr>
+            <a:cxnSpLocks/>
+            <a:endCxn id="9" idx="1"/>
+          </p:cNvCxnSpPr>
+          <p:nvPr/>
+        </p:nvCxnSpPr>
+        <p:spPr>
+          <a:xfrm rot="16200000" flipH="1">
+            <a:off x="1097765" y="1832766"/>
+            <a:ext cx="823732" cy="796146"/>
+          </a:xfrm>
+          <a:prstGeom prst="bentConnector2">
+            <a:avLst/>
+          </a:prstGeom>
+          <a:ln>
+            <a:solidFill>
+              <a:schemeClr val="tx1"/>
+            </a:solidFill>
+            <a:headEnd type="none" w="med" len="med"/>
+            <a:tailEnd type="triangle"/>
+          </a:ln>
+        </p:spPr>
+        <p:style>
+          <a:lnRef idx="1">
+            <a:schemeClr val="accent1"/>
+          </a:lnRef>
+          <a:fillRef idx="0">
+            <a:schemeClr val="accent1"/>
+          </a:fillRef>
+          <a:effectRef idx="0">
+            <a:schemeClr val="accent1"/>
+          </a:effectRef>
+          <a:fontRef idx="minor">
+            <a:schemeClr val="tx1"/>
+          </a:fontRef>
+        </p:style>
+      </p:cxnSp>
+      <p:cxnSp>
+        <p:nvCxnSpPr>
+          <p:cNvPr id="16" name="コネクタ: カギ線 15">
+            <a:extLst>
+              <a:ext uri="{FF2B5EF4-FFF2-40B4-BE49-F238E27FC236}">
+                <a16:creationId xmlns:a16="http://schemas.microsoft.com/office/drawing/2014/main" id="{4A14CE94-3E5C-D919-0143-498C12FA0584}"/>
+              </a:ext>
+            </a:extLst>
+          </p:cNvPr>
+          <p:cNvCxnSpPr>
+            <a:stCxn id="3" idx="1"/>
+            <a:endCxn id="8" idx="1"/>
+          </p:cNvCxnSpPr>
+          <p:nvPr/>
+        </p:nvCxnSpPr>
+        <p:spPr>
+          <a:xfrm rot="10800000" flipH="1" flipV="1">
+            <a:off x="539552" y="1462284"/>
+            <a:ext cx="1244912" cy="4810975"/>
+          </a:xfrm>
+          <a:prstGeom prst="bentConnector3">
+            <a:avLst>
+              <a:gd name="adj1" fmla="val -18363"/>
+            </a:avLst>
+          </a:prstGeom>
+          <a:ln>
+            <a:solidFill>
+              <a:schemeClr val="tx1"/>
+            </a:solidFill>
+            <a:headEnd type="none" w="med" len="med"/>
+            <a:tailEnd type="triangle"/>
+          </a:ln>
+        </p:spPr>
+        <p:style>
+          <a:lnRef idx="1">
+            <a:schemeClr val="accent1"/>
+          </a:lnRef>
+          <a:fillRef idx="0">
+            <a:schemeClr val="accent1"/>
+          </a:fillRef>
+          <a:effectRef idx="0">
+            <a:schemeClr val="accent1"/>
+          </a:effectRef>
+          <a:fontRef idx="minor">
+            <a:schemeClr val="tx1"/>
+          </a:fontRef>
+        </p:style>
+      </p:cxnSp>
     </p:spTree>
     <p:extLst>
       <p:ext uri="{BB962C8B-B14F-4D97-AF65-F5344CB8AC3E}">
@@ -20762,7 +20955,11 @@
           <a:lstStyle/>
           <a:p>
             <a:pPr algn="ctr"/>
-            <a:endParaRPr kumimoji="1" lang="ja-JP" altLang="en-US"/>
+            <a:r>
+              <a:rPr kumimoji="1" lang="en-US" altLang="ja-JP" dirty="0"/>
+              <a:t>c</a:t>
+            </a:r>
+            <a:endParaRPr kumimoji="1" lang="ja-JP" altLang="en-US" dirty="0"/>
           </a:p>
         </p:txBody>
       </p:sp>
@@ -20814,7 +21011,11 @@
           <a:lstStyle/>
           <a:p>
             <a:pPr algn="ctr"/>
-            <a:endParaRPr kumimoji="1" lang="ja-JP" altLang="en-US"/>
+            <a:r>
+              <a:rPr kumimoji="1" lang="en-US" altLang="ja-JP" dirty="0"/>
+              <a:t>c</a:t>
+            </a:r>
+            <a:endParaRPr kumimoji="1" lang="ja-JP" altLang="en-US" dirty="0"/>
           </a:p>
         </p:txBody>
       </p:sp>

--- a/04-practice-git/slides/04-git-basic.pptx
+++ b/04-practice-git/slides/04-git-basic.pptx
@@ -238,7 +238,7 @@
           </a:lstStyle>
           <a:p>
             <a:fld id="{6B8D1B20-A248-FB47-8240-73C0C5F47C9D}" type="datetimeFigureOut">
-              <a:t>2026/3/6</a:t>
+              <a:t>2026/3/9</a:t>
             </a:fld>
             <a:endParaRPr kumimoji="1" lang="ja-JP" altLang="en-US"/>
           </a:p>
@@ -2567,29 +2567,8 @@
           <a:p>
             <a:r>
               <a:rPr kumimoji="1" lang="ja-JP" altLang="en-US" dirty="0"/>
-              <a:t>なっている </a:t>
-            </a:r>
-            <a:r>
-              <a:rPr kumimoji="1" lang="en-US" altLang="ja-JP" dirty="0"/>
-              <a:t>(PC</a:t>
-            </a:r>
-            <a:r>
-              <a:rPr kumimoji="1" lang="ja-JP" altLang="en-US" dirty="0"/>
-              <a:t>室の環境では</a:t>
-            </a:r>
-            <a:r>
-              <a:rPr kumimoji="1" lang="en-US" altLang="ja-JP" dirty="0"/>
-              <a:t>/z/</a:t>
-            </a:r>
-            <a:r>
-              <a:rPr kumimoji="1" lang="ja-JP" altLang="en-US" dirty="0"/>
-              <a:t>になっているはず</a:t>
-            </a:r>
-            <a:r>
-              <a:rPr kumimoji="1" lang="en-US" altLang="ja-JP" dirty="0"/>
-              <a:t>)</a:t>
-            </a:r>
-            <a:endParaRPr kumimoji="1" lang="ja-JP" altLang="en-US" dirty="0"/>
+              <a:t>なっている</a:t>
+            </a:r>
           </a:p>
         </p:txBody>
       </p:sp>
@@ -2927,19 +2906,6 @@
               <a:rPr kumimoji="1" lang="ja-JP" altLang="en-US" dirty="0"/>
               <a:t>右の表示が変わる</a:t>
             </a:r>
-            <a:r>
-              <a:rPr kumimoji="1" lang="en-US" altLang="ja-JP" dirty="0"/>
-              <a:t>(/z/github</a:t>
-            </a:r>
-            <a:r>
-              <a:rPr kumimoji="1" lang="ja-JP" altLang="en-US" dirty="0"/>
-              <a:t>になるはず</a:t>
-            </a:r>
-            <a:r>
-              <a:rPr kumimoji="1" lang="en-US" altLang="ja-JP" dirty="0"/>
-              <a:t>)</a:t>
-            </a:r>
-            <a:endParaRPr kumimoji="1" lang="ja-JP" altLang="en-US" dirty="0"/>
           </a:p>
         </p:txBody>
       </p:sp>
@@ -4337,7 +4303,7 @@
         </p:nvSpPr>
         <p:spPr>
           <a:xfrm>
-            <a:off x="0" y="1196752"/>
+            <a:off x="0" y="764704"/>
             <a:ext cx="2236510" cy="400110"/>
           </a:xfrm>
           <a:prstGeom prst="rect">
@@ -4380,7 +4346,7 @@
         </p:blipFill>
         <p:spPr>
           <a:xfrm>
-            <a:off x="576064" y="2276872"/>
+            <a:off x="576064" y="1844824"/>
             <a:ext cx="3779848" cy="3398815"/>
           </a:xfrm>
           <a:prstGeom prst="rect">
@@ -4402,7 +4368,7 @@
         </p:nvSpPr>
         <p:spPr>
           <a:xfrm>
-            <a:off x="864096" y="2276872"/>
+            <a:off x="864096" y="1844824"/>
             <a:ext cx="720080" cy="288032"/>
           </a:xfrm>
           <a:prstGeom prst="roundRect">
@@ -4454,7 +4420,7 @@
         </p:nvSpPr>
         <p:spPr>
           <a:xfrm>
-            <a:off x="1080120" y="3861048"/>
+            <a:off x="1080120" y="3429000"/>
             <a:ext cx="3096344" cy="288032"/>
           </a:xfrm>
           <a:prstGeom prst="roundRect">
@@ -4506,7 +4472,7 @@
         </p:nvSpPr>
         <p:spPr>
           <a:xfrm>
-            <a:off x="432048" y="1628800"/>
+            <a:off x="432048" y="1196752"/>
             <a:ext cx="5570756" cy="400110"/>
           </a:xfrm>
           <a:prstGeom prst="rect">
@@ -4541,7 +4507,7 @@
         </p:nvSpPr>
         <p:spPr>
           <a:xfrm>
-            <a:off x="4392488" y="3429000"/>
+            <a:off x="4392488" y="2996952"/>
             <a:ext cx="4570482" cy="923330"/>
           </a:xfrm>
           <a:prstGeom prst="rect">
@@ -4574,6 +4540,94 @@
               <a:t>「はい、作成者を信頼します」を選ぶ</a:t>
             </a:r>
             <a:endParaRPr kumimoji="1" lang="ja-JP" altLang="en-US" dirty="0"/>
+          </a:p>
+        </p:txBody>
+      </p:sp>
+      <p:sp>
+        <p:nvSpPr>
+          <p:cNvPr id="3" name="テキスト ボックス 2">
+            <a:extLst>
+              <a:ext uri="{FF2B5EF4-FFF2-40B4-BE49-F238E27FC236}">
+                <a16:creationId xmlns:a16="http://schemas.microsoft.com/office/drawing/2014/main" id="{53C23182-EB3C-2754-75B9-B2E66D7B453B}"/>
+              </a:ext>
+            </a:extLst>
+          </p:cNvPr>
+          <p:cNvSpPr txBox="1"/>
+          <p:nvPr/>
+        </p:nvSpPr>
+        <p:spPr>
+          <a:xfrm>
+            <a:off x="827584" y="6237312"/>
+            <a:ext cx="1031051" cy="400110"/>
+          </a:xfrm>
+          <a:prstGeom prst="rect">
+            <a:avLst/>
+          </a:prstGeom>
+          <a:noFill/>
+          <a:ln>
+            <a:solidFill>
+              <a:schemeClr val="tx1"/>
+            </a:solidFill>
+          </a:ln>
+        </p:spPr>
+        <p:txBody>
+          <a:bodyPr wrap="none" rtlCol="0">
+            <a:spAutoFit/>
+          </a:bodyPr>
+          <a:lstStyle/>
+          <a:p>
+            <a:r>
+              <a:rPr lang="en-US" altLang="ja-JP" sz="2000" dirty="0">
+                <a:latin typeface="Consolas" panose="020B0609020204030204" pitchFamily="49" charset="0"/>
+              </a:rPr>
+              <a:t>code .</a:t>
+            </a:r>
+            <a:endParaRPr kumimoji="1" lang="ja-JP" altLang="en-US" sz="2000" dirty="0">
+              <a:latin typeface="Consolas" panose="020B0609020204030204" pitchFamily="49" charset="0"/>
+            </a:endParaRPr>
+          </a:p>
+        </p:txBody>
+      </p:sp>
+      <p:sp>
+        <p:nvSpPr>
+          <p:cNvPr id="5" name="テキスト ボックス 4">
+            <a:extLst>
+              <a:ext uri="{FF2B5EF4-FFF2-40B4-BE49-F238E27FC236}">
+                <a16:creationId xmlns:a16="http://schemas.microsoft.com/office/drawing/2014/main" id="{C9892128-1643-8000-AE53-68B774ECE632}"/>
+              </a:ext>
+            </a:extLst>
+          </p:cNvPr>
+          <p:cNvSpPr txBox="1"/>
+          <p:nvPr/>
+        </p:nvSpPr>
+        <p:spPr>
+          <a:xfrm>
+            <a:off x="251520" y="5373216"/>
+            <a:ext cx="8392041" cy="707886"/>
+          </a:xfrm>
+          <a:prstGeom prst="rect">
+            <a:avLst/>
+          </a:prstGeom>
+          <a:noFill/>
+        </p:spPr>
+        <p:txBody>
+          <a:bodyPr wrap="none" rtlCol="0">
+            <a:spAutoFit/>
+          </a:bodyPr>
+          <a:lstStyle/>
+          <a:p>
+            <a:r>
+              <a:rPr kumimoji="1" lang="ja-JP" altLang="en-US" sz="2000" dirty="0"/>
+              <a:t>もしくは、ターミナルで目的のディレクトリをカレントディレクトリに</a:t>
+            </a:r>
+            <a:endParaRPr kumimoji="1" lang="en-US" altLang="ja-JP" sz="2000" dirty="0"/>
+          </a:p>
+          <a:p>
+            <a:r>
+              <a:rPr lang="ja-JP" altLang="en-US" sz="2000" dirty="0"/>
+              <a:t>した状態で以下を実行</a:t>
+            </a:r>
+            <a:endParaRPr kumimoji="1" lang="ja-JP" altLang="en-US" sz="2000" dirty="0"/>
           </a:p>
         </p:txBody>
       </p:sp>
